--- a/docs/activities/Unit-01-02A-Intro-Descriptive.pptx
+++ b/docs/activities/Unit-01-02A-Intro-Descriptive.pptx
@@ -5,7 +5,7 @@
     <p:sldMasterId id="2147483648" r:id="rId1"/>
   </p:sldMasterIdLst>
   <p:notesMasterIdLst>
-    <p:notesMasterId r:id="rId23"/>
+    <p:notesMasterId r:id="rId24"/>
   </p:notesMasterIdLst>
   <p:sldIdLst>
     <p:sldId id="256" r:id="rId2"/>
@@ -29,6 +29,7 @@
     <p:sldId id="274" r:id="rId20"/>
     <p:sldId id="275" r:id="rId21"/>
     <p:sldId id="276" r:id="rId22"/>
+    <p:sldId id="277" r:id="rId23"/>
   </p:sldIdLst>
   <p:sldSz cx="9144000" cy="6858000" type="screen4x3"/>
   <p:notesSz cx="6858000" cy="9144000"/>
@@ -6553,6 +6554,117 @@
       <p:bldP spid="3" grpId="0" uiExpand="1" build="p"/>
     </p:bldLst>
   </p:timing>
+</p:sld>
+</file>
+
+<file path=ppt/slides/slide22.xml><?xml version="1.0" encoding="utf-8"?>
+<p:sld xmlns:a="http://schemas.openxmlformats.org/drawingml/2006/main" xmlns:r="http://schemas.openxmlformats.org/officeDocument/2006/relationships" xmlns:p="http://schemas.openxmlformats.org/presentationml/2006/main">
+  <p:cSld>
+    <p:spTree>
+      <p:nvGrpSpPr>
+        <p:cNvPr id="1" name=""/>
+        <p:cNvGrpSpPr/>
+        <p:nvPr/>
+      </p:nvGrpSpPr>
+      <p:grpSpPr>
+        <a:xfrm>
+          <a:off x="0" y="0"/>
+          <a:ext cx="0" cy="0"/>
+          <a:chOff x="0" y="0"/>
+          <a:chExt cx="0" cy="0"/>
+        </a:xfrm>
+      </p:grpSpPr>
+      <p:sp>
+        <p:nvSpPr>
+          <p:cNvPr id="2" name="Title Placeholder 1"/>
+          <p:cNvSpPr>
+            <a:spLocks noGrp="1"/>
+          </p:cNvSpPr>
+          <p:nvPr>
+            <p:ph type="title"/>
+          </p:nvPr>
+        </p:nvSpPr>
+        <p:spPr bwMode="auto">
+          <a:xfrm>
+            <a:off x="433680" y="423297"/>
+            <a:ext cx="8229600" cy="784602"/>
+          </a:xfrm>
+          <a:prstGeom prst="rect">
+            <a:avLst/>
+          </a:prstGeom>
+          <a:noFill/>
+          <a:ln w="9525">
+            <a:noFill/>
+            <a:miter lim="800000"/>
+            <a:headEnd/>
+            <a:tailEnd/>
+          </a:ln>
+        </p:spPr>
+        <p:txBody>
+          <a:bodyPr/>
+          <a:lstStyle/>
+          <a:p>
+            <a:pPr lvl="0" indent="0" marL="0">
+              <a:buNone/>
+            </a:pPr>
+            <a:r>
+              <a:rPr/>
+              <a:t>Settling in</a:t>
+            </a:r>
+          </a:p>
+        </p:txBody>
+      </p:sp>
+      <p:sp>
+        <p:nvSpPr>
+          <p:cNvPr id="3" name="Text Placeholder 2"/>
+          <p:cNvSpPr>
+            <a:spLocks noGrp="1"/>
+          </p:cNvSpPr>
+          <p:nvPr>
+            <p:ph idx="1"/>
+          </p:nvPr>
+        </p:nvSpPr>
+        <p:spPr/>
+        <p:txBody>
+          <a:bodyPr/>
+          <a:lstStyle/>
+          <a:p>
+            <a:pPr lvl="0" indent="0" marL="0">
+              <a:buNone/>
+            </a:pPr>
+            <a:r>
+              <a:rPr/>
+              <a:t>💻 Put away your laptop and mobile phone, and take out your notebook or preferred writing device. 💬 Chat with your neighbors and share one thing you enjoyed doing this summer. 🎵 Enjoy the music! CWRU playlist was created from your responses to the Early Course Survey and I will continue to add more songs from your replies. ⏳ We’ll get started shortly!</a:t>
+            </a:r>
+          </a:p>
+        </p:txBody>
+      </p:sp>
+      <p:sp>
+        <p:nvSpPr>
+          <p:cNvPr id="4" name="Slide Number Placeholder 3"/>
+          <p:cNvSpPr>
+            <a:spLocks noGrp="1"/>
+          </p:cNvSpPr>
+          <p:nvPr>
+            <p:ph idx="10" sz="quarter" type="sldNum"/>
+          </p:nvPr>
+        </p:nvSpPr>
+        <p:spPr/>
+        <p:txBody>
+          <a:bodyPr/>
+          <a:lstStyle/>
+          <a:p>
+            <a:fld id="{9C13042B-154E-4D18-B726-07B2F714EFCF}" type="slidenum">
+              <a:rPr lang="en-US" smtClean="0"/>
+              <a:pPr/>
+              <a:t>‹#›</a:t>
+            </a:fld>
+            <a:endParaRPr dirty="0" lang="en-US"/>
+          </a:p>
+        </p:txBody>
+      </p:sp>
+    </p:spTree>
+  </p:cSld>
 </p:sld>
 </file>
 

--- a/docs/activities/Unit-01-02A-Intro-Descriptive.pptx
+++ b/docs/activities/Unit-01-02A-Intro-Descriptive.pptx
@@ -6629,12 +6629,31 @@
           <a:bodyPr/>
           <a:lstStyle/>
           <a:p>
-            <a:pPr lvl="0" indent="0" marL="0">
-              <a:buNone/>
-            </a:pPr>
-            <a:r>
-              <a:rPr/>
-              <a:t>💻 Put away your laptop and mobile phone, and take out your notebook or preferred writing device. 💬 Chat with your neighbors and share one thing you enjoyed doing this summer. 🎵 Enjoy the music! CWRU playlist was created from your responses to the Early Course Survey and I will continue to add more songs from your replies. ⏳ We’ll get started shortly!</a:t>
+            <a:pPr lvl="0"/>
+            <a:r>
+              <a:rPr/>
+              <a:t>💻 Put away your laptop and mobile phone, and take out your notebook or preferred writing device.</a:t>
+            </a:r>
+          </a:p>
+          <a:p>
+            <a:pPr lvl="0"/>
+            <a:r>
+              <a:rPr/>
+              <a:t>💬 Chat with your neighbors and share one thing you enjoyed doing this summer.</a:t>
+            </a:r>
+          </a:p>
+          <a:p>
+            <a:pPr lvl="0"/>
+            <a:r>
+              <a:rPr/>
+              <a:t>🎵 Enjoy the music! CWRU playlist was created from your responses to the Early Course Survey and I will continue to add more songs from your replies.</a:t>
+            </a:r>
+          </a:p>
+          <a:p>
+            <a:pPr lvl="0"/>
+            <a:r>
+              <a:rPr/>
+              <a:t>⏳ We’ll get started shortly!</a:t>
             </a:r>
           </a:p>
         </p:txBody>

--- a/docs/activities/Unit-01-02A-Intro-Descriptive.pptx
+++ b/docs/activities/Unit-01-02A-Intro-Descriptive.pptx
@@ -6198,6 +6198,17 @@
               <a:rPr/>
               <a:t> the data are collected.</a:t>
             </a:r>
+          </a:p>
+          <a:p>
+            <a:pPr lvl="0" indent="0" marL="0">
+              <a:buNone/>
+            </a:pPr>
+            <a:br/>
+            <a:br/>
+            <a:br/>
+            <a:br/>
+            <a:br/>
+            <a:br/>
           </a:p>
         </p:txBody>
       </p:sp>

--- a/docs/activities/Unit-01-02A-Intro-Descriptive.pptx
+++ b/docs/activities/Unit-01-02A-Intro-Descriptive.pptx
@@ -6666,6 +6666,16 @@
               <a:rPr/>
               <a:t>⏳ We’ll get started shortly!</a:t>
             </a:r>
+          </a:p>
+          <a:p>
+            <a:pPr lvl="0" indent="0" marL="0">
+              <a:buNone/>
+            </a:pPr>
+            <a:br/>
+            <a:br/>
+            <a:br/>
+            <a:br/>
+            <a:br/>
           </a:p>
         </p:txBody>
       </p:sp>

--- a/docs/activities/Unit-01-02A-Intro-Descriptive.pptx
+++ b/docs/activities/Unit-01-02A-Intro-Descriptive.pptx
@@ -6650,7 +6650,7 @@
             <a:pPr lvl="0"/>
             <a:r>
               <a:rPr/>
-              <a:t>💬 Chat with your neighbors and share one thing you enjoyed doing this summer.</a:t>
+              <a:t>💬 Chat with your neighbors and share one thing you plan to do this weekend.</a:t>
             </a:r>
           </a:p>
           <a:p>
@@ -6665,6 +6665,23 @@
             <a:r>
               <a:rPr/>
               <a:t>⏳ We’ll get started shortly!</a:t>
+            </a:r>
+          </a:p>
+          <a:p>
+            <a:pPr lvl="0"/>
+            <a:r>
+              <a:rPr/>
+              <a:t>Download additional Handout on </a:t>
+            </a:r>
+            <a:r>
+              <a:rPr>
+                <a:hlinkClick r:id="rId2"/>
+              </a:rPr>
+              <a:t>Boxplot</a:t>
+            </a:r>
+            <a:r>
+              <a:rPr/>
+              <a:t> (no need to print and bring it in the class though!)</a:t>
             </a:r>
           </a:p>
           <a:p>

--- a/docs/activities/Unit-01-02A-Intro-Descriptive.pptx
+++ b/docs/activities/Unit-01-02A-Intro-Descriptive.pptx
@@ -5,7 +5,7 @@
     <p:sldMasterId id="2147483648" r:id="rId1"/>
   </p:sldMasterIdLst>
   <p:notesMasterIdLst>
-    <p:notesMasterId r:id="rId24"/>
+    <p:notesMasterId r:id="rId26"/>
   </p:notesMasterIdLst>
   <p:sldIdLst>
     <p:sldId id="256" r:id="rId2"/>
@@ -30,6 +30,8 @@
     <p:sldId id="275" r:id="rId21"/>
     <p:sldId id="276" r:id="rId22"/>
     <p:sldId id="277" r:id="rId23"/>
+    <p:sldId id="278" r:id="rId24"/>
+    <p:sldId id="279" r:id="rId25"/>
   </p:sldIdLst>
   <p:sldSz cx="9144000" cy="6858000" type="screen4x3"/>
   <p:notesSz cx="6858000" cy="9144000"/>
@@ -6568,7 +6570,10 @@
 </p:sld>
 </file>
 
-<file path=ppt/slides/slide22.xml><?xml version="1.0" encoding="utf-8"?>
+<file path=ppt/slides/slide22.xml><?xml version="1.0" encoding="UTF-8"?><p:sld xmlns:a="http://schemas.openxmlformats.org/drawingml/2006/main" xmlns:r="http://schemas.openxmlformats.org/officeDocument/2006/relationships" xmlns:p="http://schemas.openxmlformats.org/presentationml/2006/main"><p:cSld><p:spTree><p:nvGrpSpPr><p:cNvPr id="1" name="" /><p:cNvGrpSpPr /><p:nvPr /></p:nvGrpSpPr><p:grpSpPr><a:xfrm><a:off x="0" y="0" /><a:ext cx="0" cy="0" /><a:chOff x="0" y="0" /><a:chExt cx="0" cy="0" /></a:xfrm></p:grpSpPr><p:sp><p:nvSpPr><p:cNvPr id="2" name="Title 1" /><p:cNvSpPr><a:spLocks noGrp="1" /></p:cNvSpPr><p:nvPr><p:ph type="title" /></p:nvPr></p:nvSpPr><p:spPr><a:xfrm><a:off x="457201" y="204787" /><a:ext cx="3008313" cy="871538" /></a:xfrm></p:spPr><p:txBody><a:bodyPr /><a:lstStyle /><a:p><a:pPr lvl="0" indent="0" marL="0"><a:buNone /></a:pPr><a:r><a:rPr /><a:t>Example: Sample Variance and Standard Deviation</a:t></a:r></a:p></p:txBody></p:sp><mc:AlternateContent xmlns:mc="http://schemas.openxmlformats.org/markup-compatibility/2006"><mc:Choice xmlns:a14="http://schemas.microsoft.com/office/drawing/2010/main" Requires="a14"><p:sp><p:nvSpPr><p:cNvPr id="4" name="Text Placeholder 3" /><p:cNvSpPr><a:spLocks noGrp="1" /></p:cNvSpPr><p:nvPr><p:ph idx="2" sz="half" type="body" /></p:nvPr></p:nvSpPr><p:spPr /><p:txBody><a:bodyPr /><a:lstStyle /><a:p><a:pPr lvl="0" indent="0" marL="0"><a:buNone /></a:pPr><a:r><a:rPr /><a:t>Suppose we have collected the following random sample of </a:t></a:r><a14:m><m:oMath xmlns:m="http://schemas.openxmlformats.org/officeDocument/2006/math"><m:r><m:t>n</m:t></m:r><m:r><m:rPr><m:sty m:val="p" /></m:rPr><m:t>=</m:t></m:r><m:r><m:t>5</m:t></m:r></m:oMath></a14:m><a:r><a:rPr /><a:t> observations:</a:t></a:r></a:p><a:p><a:pPr lvl="0" indent="0" marL="0"><a:buNone /></a:pPr><a14:m><m:oMathPara xmlns:m="http://schemas.openxmlformats.org/officeDocument/2006/math"><m:oMathParaPr><m:jc m:val="center" /></m:oMathParaPr><m:oMath><m:r><m:rPr><m:sty m:val="p" /></m:rPr><m:t>{</m:t></m:r><m:r><m:t>3</m:t></m:r><m:r><m:rPr><m:sty m:val="p" /></m:rPr><m:t>,</m:t></m:r><m:r><m:t>7</m:t></m:r><m:r><m:rPr><m:sty m:val="p" /></m:rPr><m:t>,</m:t></m:r><m:r><m:t>10</m:t></m:r><m:r><m:rPr><m:sty m:val="p" /></m:rPr><m:t>,</m:t></m:r><m:r><m:t>11</m:t></m:r><m:r><m:rPr><m:sty m:val="p" /></m:rPr><m:t>,</m:t></m:r><m:r><m:t>14</m:t></m:r><m:r><m:rPr><m:sty m:val="p" /></m:rPr><m:t>}</m:t></m:r></m:oMath></m:oMathPara></a14:m></a:p><a:p><a:pPr lvl="0" indent="0" marL="0"><a:buNone /></a:pPr><a:r><a:rPr /><a:t>Find the </a:t></a:r><a:r><a:rPr b="1" /><a:t>sample variance</a:t></a:r><a:r><a:rPr /><a:t> and </a:t></a:r><a:r><a:rPr b="1" /><a:t>sample standard deviation</a:t></a:r><a:r><a:rPr /><a:t>.</a:t></a:r></a:p><a:p><a:pPr lvl="0" indent="0" marL="0"><a:spcBef><a:spcPts val="3000" /></a:spcBef><a:buNone /></a:pPr><a:r><a:rPr b="1" /><a:t>Step 1: Calculate the sample mean</a:t></a:r></a:p><a:p><a:pPr lvl="0" indent="0" marL="0"><a:buNone /></a:pPr><a14:m><m:oMathPara xmlns:m="http://schemas.openxmlformats.org/officeDocument/2006/math"><m:oMathParaPr><m:jc m:val="center" /></m:oMathParaPr><m:oMath><m:m><m:mPr><m:baseJc m:val="center" /><m:plcHide m:val="on" /><m:mcs><m:mc><m:mcPr><m:mcJc m:val="right" /><m:count m:val="1" /></m:mcPr></m:mc><m:mc><m:mcPr><m:mcJc m:val="left" /><m:count m:val="1" /></m:mcPr></m:mc></m:mcs></m:mPr><m:mr><m:e><m:acc><m:accPr><m:chr m:val="‾" /></m:accPr><m:e><m:r><m:t>x</m:t></m:r></m:e></m:acc></m:e><m:e><m:r><m:rPr><m:sty m:val="p" /></m:rPr><m:t>=</m:t></m:r><m:f><m:fPr><m:type m:val="bar" /></m:fPr><m:num><m:nary><m:naryPr><m:chr m:val="∑" /><m:limLoc m:val="undOvr" /><m:subHide m:val="off" /><m:supHide m:val="off" /></m:naryPr><m:sub><m:r><m:t>i</m:t></m:r><m:r><m:rPr><m:sty m:val="p" /></m:rPr><m:t>=</m:t></m:r><m:r><m:t>1</m:t></m:r></m:sub><m:sup><m:r><m:t>n</m:t></m:r></m:sup><m:e><m:sSub><m:e><m:r><m:t>x</m:t></m:r></m:e><m:sub><m:r><m:t>i</m:t></m:r></m:sub></m:sSub></m:e></m:nary></m:num><m:den><m:r><m:t>n</m:t></m:r></m:den></m:f></m:e></m:mr><m:mr><m:e /><m:e><m:r><m:rPr><m:sty m:val="p" /></m:rPr><m:t>=</m:t></m:r><m:f><m:fPr><m:type m:val="bar" /></m:fPr><m:num><m:r><m:t>3</m:t></m:r><m:r><m:rPr><m:sty m:val="p" /></m:rPr><m:t>+</m:t></m:r><m:r><m:t>7</m:t></m:r><m:r><m:rPr><m:sty m:val="p" /></m:rPr><m:t>+</m:t></m:r><m:r><m:t>10</m:t></m:r><m:r><m:rPr><m:sty m:val="p" /></m:rPr><m:t>+</m:t></m:r><m:r><m:t>11</m:t></m:r><m:r><m:rPr><m:sty m:val="p" /></m:rPr><m:t>+</m:t></m:r><m:r><m:t>14</m:t></m:r></m:num><m:den><m:r><m:t>5</m:t></m:r></m:den></m:f></m:e></m:mr><m:mr><m:e /><m:e><m:r><m:rPr><m:sty m:val="p" /></m:rPr><m:t>=</m:t></m:r><m:f><m:fPr><m:type m:val="bar" /></m:fPr><m:num><m:r><m:t>45</m:t></m:r></m:num><m:den><m:r><m:t>5</m:t></m:r></m:den></m:f></m:e></m:mr><m:mr><m:e /><m:e><m:r><m:rPr><m:sty m:val="p" /></m:rPr><m:t>=</m:t></m:r><m:r><m:t>9</m:t></m:r><m:r><m:rPr><m:sty m:val="p" /></m:rPr><m:t>.</m:t></m:r></m:e></m:mr></m:m></m:oMath></m:oMathPara></a14:m></a:p><a:p><a:pPr lvl="0" indent="0" marL="0"><a:spcBef><a:spcPts val="3000" /></a:spcBef><a:buNone /></a:pPr><a:r><a:rPr b="1" /><a:t>Step 2: Complete the table</a:t></a:r></a:p></p:txBody></p:sp></mc:Choice></mc:AlternateContent><p:graphicFrame><p:nvGraphicFramePr><p:cNvPr id="6" name="Content Placeholder 5" /><p:cNvGraphicFramePr><a:graphicFrameLocks noGrp="1" /></p:cNvGraphicFramePr><p:nvPr><p:ph idx="1" /></p:nvPr></p:nvGraphicFramePr><p:xfrm><a:off x="3568700" y="203200" /><a:ext cx="5105400" cy="4381500" /></p:xfrm><a:graphic><a:graphicData uri="http://schemas.openxmlformats.org/drawingml/2006/table"><a:tbl><a:tblPr firstRow="1" bandRow="1"><a:tableStyleId>{5C22544A-7EE6-4342-B048-85BDC9FD1C3A}</a:tableStyleId></a:tblPr><a:tblGrid><a:gridCol w="1270000" /><a:gridCol w="1270000" /><a:gridCol w="1270000" /><a:gridCol w="1270000" /></a:tblGrid><a:tr h="0"><a:tc><a:txBody><a:bodyPr /><a:lstStyle /><a:p><a:pPr lvl="0" indent="0" marL="0" algn="ctr"><a:buNone /></a:pPr><a14:m><m:oMath xmlns:m="http://schemas.openxmlformats.org/officeDocument/2006/math"><m:sSub><m:e><m:r><m:t>x</m:t></m:r></m:e><m:sub><m:r><m:t>i</m:t></m:r></m:sub></m:sSub></m:oMath></a14:m></a:p></a:txBody><a:tcPr /></a:tc><a:tc><a:txBody><a:bodyPr /><a:lstStyle /><a:p><a:pPr lvl="0" indent="0" marL="0" algn="ctr"><a:buNone /></a:pPr><a14:m><m:oMath xmlns:m="http://schemas.openxmlformats.org/officeDocument/2006/math"><m:sSub><m:e><m:r><m:t>x</m:t></m:r></m:e><m:sub><m:r><m:t>i</m:t></m:r></m:sub></m:sSub><m:r><m:rPr><m:sty m:val="p" /></m:rPr><m:t>−</m:t></m:r><m:acc><m:accPr><m:chr m:val="‾" /></m:accPr><m:e><m:r><m:t>x</m:t></m:r></m:e></m:acc></m:oMath></a14:m></a:p></a:txBody><a:tcPr /></a:tc><a:tc><a:txBody><a:bodyPr /><a:lstStyle /><a:p><a:pPr lvl="0" indent="0" marL="0" algn="ctr"><a:buNone /></a:pPr><a14:m><m:oMath xmlns:m="http://schemas.openxmlformats.org/officeDocument/2006/math"><m:sSup><m:e><m:d><m:dPr><m:begChr m:val="(" /><m:sepChr m:val="" /><m:endChr m:val=")" /><m:grow /></m:dPr><m:e><m:sSub><m:e><m:r><m:t>x</m:t></m:r></m:e><m:sub><m:r><m:t>i</m:t></m:r></m:sub></m:sSub><m:r><m:rPr><m:sty m:val="p" /></m:rPr><m:t>−</m:t></m:r><m:acc><m:accPr><m:chr m:val="‾" /></m:accPr><m:e><m:r><m:t>x</m:t></m:r></m:e></m:acc></m:e></m:d></m:e><m:sup><m:r><m:t>2</m:t></m:r></m:sup></m:sSup></m:oMath></a14:m></a:p></a:txBody><a:tcPr /></a:tc><a:tc><a:txBody><a:bodyPr /><a:lstStyle /><a:p><a:pPr lvl="0" indent="0" marL="0" algn="ctr"><a:buNone /></a:pPr><a14:m><m:oMath xmlns:m="http://schemas.openxmlformats.org/officeDocument/2006/math"><m:sSubSup><m:e><m:r><m:t>x</m:t></m:r></m:e><m:sub><m:r><m:t>i</m:t></m:r></m:sub><m:sup><m:r><m:t>2</m:t></m:r></m:sup></m:sSubSup></m:oMath></a14:m></a:p></a:txBody><a:tcPr /></a:tc></a:tr><a:tr h="0"><a:tc><a:txBody><a:bodyPr /><a:lstStyle /><a:p><a:pPr lvl="0" indent="0" marL="0" algn="ctr"><a:buNone /></a:pPr><a:r><a:rPr /><a:t>3</a:t></a:r></a:p></a:txBody></a:tc><a:tc><a:txBody><a:bodyPr /><a:lstStyle /><a:p><a:pPr lvl="0" indent="0" marL="0" algn="ctr"><a:buNone /></a:pPr><a14:m><m:oMath xmlns:m="http://schemas.openxmlformats.org/officeDocument/2006/math"><m:r><m:rPr><m:sty m:val="p" /></m:rPr><m:t>−</m:t></m:r><m:r><m:t>6</m:t></m:r></m:oMath></a14:m></a:p></a:txBody></a:tc><a:tc><a:txBody><a:bodyPr /><a:lstStyle /><a:p><a:pPr lvl="0" indent="0" marL="0" algn="ctr"><a:buNone /></a:pPr><a:r><a:rPr /><a:t>36</a:t></a:r></a:p></a:txBody></a:tc><a:tc><a:txBody><a:bodyPr /><a:lstStyle /><a:p><a:pPr lvl="0" indent="0" marL="0" algn="ctr"><a:buNone /></a:pPr><a:r><a:rPr /><a:t>9</a:t></a:r></a:p></a:txBody></a:tc></a:tr><a:tr h="0"><a:tc><a:txBody><a:bodyPr /><a:lstStyle /><a:p><a:pPr lvl="0" indent="0" marL="0" algn="ctr"><a:buNone /></a:pPr><a:r><a:rPr /><a:t>7</a:t></a:r></a:p></a:txBody></a:tc><a:tc><a:txBody><a:bodyPr /><a:lstStyle /><a:p><a:pPr lvl="0" indent="0" marL="0" algn="ctr"><a:buNone /></a:pPr><a14:m><m:oMath xmlns:m="http://schemas.openxmlformats.org/officeDocument/2006/math"><m:r><m:rPr><m:sty m:val="p" /></m:rPr><m:t>−</m:t></m:r><m:r><m:t>2</m:t></m:r></m:oMath></a14:m></a:p></a:txBody></a:tc><a:tc><a:txBody><a:bodyPr /><a:lstStyle /><a:p><a:pPr lvl="0" indent="0" marL="0" algn="ctr"><a:buNone /></a:pPr><a:r><a:rPr /><a:t>4</a:t></a:r></a:p></a:txBody></a:tc><a:tc><a:txBody><a:bodyPr /><a:lstStyle /><a:p><a:pPr lvl="0" indent="0" marL="0" algn="ctr"><a:buNone /></a:pPr><a:r><a:rPr /><a:t>49</a:t></a:r></a:p></a:txBody></a:tc></a:tr><a:tr h="0"><a:tc><a:txBody><a:bodyPr /><a:lstStyle /><a:p><a:pPr lvl="0" indent="0" marL="0" algn="ctr"><a:buNone /></a:pPr><a:r><a:rPr /><a:t>10</a:t></a:r></a:p></a:txBody></a:tc><a:tc><a:txBody><a:bodyPr /><a:lstStyle /><a:p><a:pPr lvl="0" indent="0" marL="0" algn="ctr"><a:buNone /></a:pPr><a:r><a:rPr /><a:t>1</a:t></a:r></a:p></a:txBody></a:tc><a:tc><a:txBody><a:bodyPr /><a:lstStyle /><a:p><a:pPr lvl="0" indent="0" marL="0" algn="ctr"><a:buNone /></a:pPr><a:r><a:rPr /><a:t>1</a:t></a:r></a:p></a:txBody></a:tc><a:tc><a:txBody><a:bodyPr /><a:lstStyle /><a:p><a:pPr lvl="0" indent="0" marL="0" algn="ctr"><a:buNone /></a:pPr><a:r><a:rPr /><a:t>100</a:t></a:r></a:p></a:txBody></a:tc></a:tr><a:tr h="0"><a:tc><a:txBody><a:bodyPr /><a:lstStyle /><a:p><a:pPr lvl="0" indent="0" marL="0" algn="ctr"><a:buNone /></a:pPr><a:r><a:rPr /><a:t>11</a:t></a:r></a:p></a:txBody></a:tc><a:tc><a:txBody><a:bodyPr /><a:lstStyle /><a:p><a:pPr lvl="0" indent="0" marL="0" algn="ctr"><a:buNone /></a:pPr><a:r><a:rPr /><a:t>2</a:t></a:r></a:p></a:txBody></a:tc><a:tc><a:txBody><a:bodyPr /><a:lstStyle /><a:p><a:pPr lvl="0" indent="0" marL="0" algn="ctr"><a:buNone /></a:pPr><a:r><a:rPr /><a:t>4</a:t></a:r></a:p></a:txBody></a:tc><a:tc><a:txBody><a:bodyPr /><a:lstStyle /><a:p><a:pPr lvl="0" indent="0" marL="0" algn="ctr"><a:buNone /></a:pPr><a:r><a:rPr /><a:t>121</a:t></a:r></a:p></a:txBody></a:tc></a:tr><a:tr h="0"><a:tc><a:txBody><a:bodyPr /><a:lstStyle /><a:p><a:pPr lvl="0" indent="0" marL="0" algn="ctr"><a:buNone /></a:pPr><a:r><a:rPr /><a:t>14</a:t></a:r></a:p></a:txBody></a:tc><a:tc><a:txBody><a:bodyPr /><a:lstStyle /><a:p><a:pPr lvl="0" indent="0" marL="0" algn="ctr"><a:buNone /></a:pPr><a:r><a:rPr /><a:t>5</a:t></a:r></a:p></a:txBody></a:tc><a:tc><a:txBody><a:bodyPr /><a:lstStyle /><a:p><a:pPr lvl="0" indent="0" marL="0" algn="ctr"><a:buNone /></a:pPr><a:r><a:rPr /><a:t>25</a:t></a:r></a:p></a:txBody></a:tc><a:tc><a:txBody><a:bodyPr /><a:lstStyle /><a:p><a:pPr lvl="0" indent="0" marL="0" algn="ctr"><a:buNone /></a:pPr><a:r><a:rPr /><a:t>196</a:t></a:r></a:p></a:txBody></a:tc></a:tr><a:tr h="0"><a:tc><a:txBody><a:bodyPr /><a:lstStyle /><a:p><a:pPr lvl="0" indent="0" marL="0" algn="ctr"><a:buNone /></a:pPr><a:r><a:rPr b="1" /><a:t>Total: 45</a:t></a:r></a:p></a:txBody></a:tc><a:tc><a:txBody><a:bodyPr /><a:lstStyle /><a:p><a:pPr lvl="0" indent="0" marL="0" algn="ctr"><a:buNone /></a:pPr><a:r><a:rPr b="1" /><a:t>0</a:t></a:r></a:p></a:txBody></a:tc><a:tc><a:txBody><a:bodyPr /><a:lstStyle /><a:p><a:pPr lvl="0" indent="0" marL="0" algn="ctr"><a:buNone /></a:pPr><a:r><a:rPr b="1" /><a:t>70</a:t></a:r></a:p></a:txBody></a:tc><a:tc><a:txBody><a:bodyPr /><a:lstStyle /><a:p><a:pPr lvl="0" indent="0" marL="0" algn="ctr"><a:buNone /></a:pPr><a:r><a:rPr b="1" /><a:t>475</a:t></a:r></a:p></a:txBody></a:tc></a:tr></a:tbl></a:graphicData></a:graphic></p:graphicFrame><p:sp><p:nvSpPr><p:cNvPr id="7" name="Slide Number Placeholder 6" /><p:cNvSpPr><a:spLocks noGrp="1" /></p:cNvSpPr><p:nvPr><p:ph idx="12" sz="quarter" type="sldNum" /></p:nvPr></p:nvSpPr><p:spPr /><p:txBody><a:bodyPr /><a:lstStyle /><a:p><a:fld id="{C5EF2332-01BF-834F-8236-50238282D533}" type="slidenum"><a:rPr lang="en-US" smtClean="0" /><a:t>‹#›</a:t></a:fld><a:endParaRPr lang="en-US" /></a:p></p:txBody></p:sp></p:spTree></p:cSld></p:sld>
+</file>
+
+<file path=ppt/slides/slide23.xml><?xml version="1.0" encoding="utf-8"?>
 <p:sld xmlns:a="http://schemas.openxmlformats.org/drawingml/2006/main" xmlns:r="http://schemas.openxmlformats.org/officeDocument/2006/relationships" xmlns:p="http://schemas.openxmlformats.org/presentationml/2006/main">
   <p:cSld>
     <p:spTree>
@@ -6585,6 +6590,981 @@
           <a:chExt cx="0" cy="0"/>
         </a:xfrm>
       </p:grpSpPr>
+      <mc:AlternateContent xmlns:mc="http://schemas.openxmlformats.org/markup-compatibility/2006">
+        <mc:Choice xmlns:a14="http://schemas.microsoft.com/office/drawing/2010/main" Requires="a14">
+          <p:sp>
+            <p:nvSpPr>
+              <p:cNvPr id="3" name="Text Placeholder 2"/>
+              <p:cNvSpPr>
+                <a:spLocks noGrp="1"/>
+              </p:cNvSpPr>
+              <p:nvPr>
+                <p:ph idx="1"/>
+              </p:nvPr>
+            </p:nvSpPr>
+            <p:spPr/>
+            <p:txBody>
+              <a:bodyPr/>
+              <a:lstStyle/>
+              <a:p>
+                <a:pPr lvl="0" indent="0" marL="0">
+                  <a:spcBef>
+                    <a:spcPts val="3000"/>
+                  </a:spcBef>
+                  <a:buNone/>
+                </a:pPr>
+                <a:r>
+                  <a:rPr b="1"/>
+                  <a:t>Step 3: Calculate the sample variance</a:t>
+                </a:r>
+              </a:p>
+              <a:p>
+                <a:pPr lvl="0" indent="0" marL="0">
+                  <a:buNone/>
+                </a:pPr>
+                <a:r>
+                  <a:rPr/>
+                  <a:t>Using the deviations from the sample mean:</a:t>
+                </a:r>
+              </a:p>
+              <a:p>
+                <a:pPr lvl="0" indent="0" marL="0">
+                  <a:buNone/>
+                </a:pPr>
+                <a14:m>
+                  <m:oMathPara xmlns:m="http://schemas.openxmlformats.org/officeDocument/2006/math">
+                    <m:oMathParaPr>
+                      <m:jc m:val="center"/>
+                    </m:oMathParaPr>
+                    <m:oMath>
+                      <m:sSup>
+                        <m:e>
+                          <m:r>
+                            <m:t>s</m:t>
+                          </m:r>
+                        </m:e>
+                        <m:sup>
+                          <m:r>
+                            <m:t>2</m:t>
+                          </m:r>
+                        </m:sup>
+                      </m:sSup>
+                      <m:r>
+                        <m:rPr>
+                          <m:sty m:val="p"/>
+                        </m:rPr>
+                        <m:t>=</m:t>
+                      </m:r>
+                      <m:f>
+                        <m:fPr>
+                          <m:type m:val="bar"/>
+                        </m:fPr>
+                        <m:num>
+                          <m:nary>
+                            <m:naryPr>
+                              <m:chr m:val="∑"/>
+                              <m:limLoc m:val="undOvr"/>
+                              <m:subHide m:val="off"/>
+                              <m:supHide m:val="off"/>
+                            </m:naryPr>
+                            <m:sub>
+                              <m:r>
+                                <m:t>i</m:t>
+                              </m:r>
+                              <m:r>
+                                <m:rPr>
+                                  <m:sty m:val="p"/>
+                                </m:rPr>
+                                <m:t>=</m:t>
+                              </m:r>
+                              <m:r>
+                                <m:t>1</m:t>
+                              </m:r>
+                            </m:sub>
+                            <m:sup>
+                              <m:r>
+                                <m:t>n</m:t>
+                              </m:r>
+                            </m:sup>
+                            <m:e>
+                              <m:sSup>
+                                <m:e>
+                                  <m:d>
+                                    <m:dPr>
+                                      <m:begChr m:val="("/>
+                                      <m:sepChr m:val=""/>
+                                      <m:endChr m:val=")"/>
+                                      <m:grow/>
+                                    </m:dPr>
+                                    <m:e>
+                                      <m:sSub>
+                                        <m:e>
+                                          <m:r>
+                                            <m:t>x</m:t>
+                                          </m:r>
+                                        </m:e>
+                                        <m:sub>
+                                          <m:r>
+                                            <m:t>i</m:t>
+                                          </m:r>
+                                        </m:sub>
+                                      </m:sSub>
+                                      <m:r>
+                                        <m:rPr>
+                                          <m:sty m:val="p"/>
+                                        </m:rPr>
+                                        <m:t>−</m:t>
+                                      </m:r>
+                                      <m:acc>
+                                        <m:accPr>
+                                          <m:chr m:val="‾"/>
+                                        </m:accPr>
+                                        <m:e>
+                                          <m:r>
+                                            <m:t>x</m:t>
+                                          </m:r>
+                                        </m:e>
+                                      </m:acc>
+                                    </m:e>
+                                  </m:d>
+                                </m:e>
+                                <m:sup>
+                                  <m:r>
+                                    <m:t>2</m:t>
+                                  </m:r>
+                                </m:sup>
+                              </m:sSup>
+                            </m:e>
+                          </m:nary>
+                        </m:num>
+                        <m:den>
+                          <m:r>
+                            <m:t>n</m:t>
+                          </m:r>
+                          <m:r>
+                            <m:rPr>
+                              <m:sty m:val="p"/>
+                            </m:rPr>
+                            <m:t>−</m:t>
+                          </m:r>
+                          <m:r>
+                            <m:t>1</m:t>
+                          </m:r>
+                        </m:den>
+                      </m:f>
+                      <m:r>
+                        <m:rPr>
+                          <m:sty m:val="p"/>
+                        </m:rPr>
+                        <m:t>.</m:t>
+                      </m:r>
+                    </m:oMath>
+                  </m:oMathPara>
+                </a14:m>
+              </a:p>
+              <a:p>
+                <a:pPr lvl="0" indent="0" marL="0">
+                  <a:buNone/>
+                </a:pPr>
+                <a:r>
+                  <a:rPr/>
+                  <a:t>Therefore,</a:t>
+                </a:r>
+              </a:p>
+              <a:p>
+                <a:pPr lvl="0" indent="0" marL="0">
+                  <a:buNone/>
+                </a:pPr>
+                <a14:m>
+                  <m:oMathPara xmlns:m="http://schemas.openxmlformats.org/officeDocument/2006/math">
+                    <m:oMathParaPr>
+                      <m:jc m:val="center"/>
+                    </m:oMathParaPr>
+                    <m:oMath>
+                      <m:m>
+                        <m:mPr>
+                          <m:baseJc m:val="center"/>
+                          <m:plcHide m:val="on"/>
+                          <m:mcs>
+                            <m:mc>
+                              <m:mcPr>
+                                <m:mcJc m:val="right"/>
+                                <m:count m:val="1"/>
+                              </m:mcPr>
+                            </m:mc>
+                            <m:mc>
+                              <m:mcPr>
+                                <m:mcJc m:val="left"/>
+                                <m:count m:val="1"/>
+                              </m:mcPr>
+                            </m:mc>
+                          </m:mcs>
+                        </m:mPr>
+                        <m:mr>
+                          <m:e>
+                            <m:sSup>
+                              <m:e>
+                                <m:r>
+                                  <m:t>s</m:t>
+                                </m:r>
+                              </m:e>
+                              <m:sup>
+                                <m:r>
+                                  <m:t>2</m:t>
+                                </m:r>
+                              </m:sup>
+                            </m:sSup>
+                          </m:e>
+                          <m:e>
+                            <m:r>
+                              <m:rPr>
+                                <m:sty m:val="p"/>
+                              </m:rPr>
+                              <m:t>=</m:t>
+                            </m:r>
+                            <m:f>
+                              <m:fPr>
+                                <m:type m:val="bar"/>
+                              </m:fPr>
+                              <m:num>
+                                <m:r>
+                                  <m:t>70</m:t>
+                                </m:r>
+                              </m:num>
+                              <m:den>
+                                <m:r>
+                                  <m:t>5</m:t>
+                                </m:r>
+                                <m:r>
+                                  <m:rPr>
+                                    <m:sty m:val="p"/>
+                                  </m:rPr>
+                                  <m:t>−</m:t>
+                                </m:r>
+                                <m:r>
+                                  <m:t>1</m:t>
+                                </m:r>
+                              </m:den>
+                            </m:f>
+                          </m:e>
+                        </m:mr>
+                        <m:mr>
+                          <m:e/>
+                          <m:e>
+                            <m:r>
+                              <m:rPr>
+                                <m:sty m:val="p"/>
+                              </m:rPr>
+                              <m:t>=</m:t>
+                            </m:r>
+                            <m:f>
+                              <m:fPr>
+                                <m:type m:val="bar"/>
+                              </m:fPr>
+                              <m:num>
+                                <m:r>
+                                  <m:t>70</m:t>
+                                </m:r>
+                              </m:num>
+                              <m:den>
+                                <m:r>
+                                  <m:t>4</m:t>
+                                </m:r>
+                              </m:den>
+                            </m:f>
+                          </m:e>
+                        </m:mr>
+                        <m:mr>
+                          <m:e/>
+                          <m:e>
+                            <m:r>
+                              <m:rPr>
+                                <m:sty m:val="p"/>
+                              </m:rPr>
+                              <m:t>=</m:t>
+                            </m:r>
+                            <m:r>
+                              <m:t>17.5</m:t>
+                            </m:r>
+                            <m:r>
+                              <m:rPr>
+                                <m:sty m:val="p"/>
+                              </m:rPr>
+                              <m:t>.</m:t>
+                            </m:r>
+                          </m:e>
+                        </m:mr>
+                      </m:m>
+                    </m:oMath>
+                  </m:oMathPara>
+                </a14:m>
+              </a:p>
+              <a:p>
+                <a:pPr lvl="0" indent="0" marL="0">
+                  <a:spcBef>
+                    <a:spcPts val="3000"/>
+                  </a:spcBef>
+                  <a:buNone/>
+                </a:pPr>
+                <a:r>
+                  <a:rPr b="1"/>
+                  <a:t>Step 4: Verify using the convenient formula</a:t>
+                </a:r>
+              </a:p>
+              <a:p>
+                <a:pPr lvl="0" indent="0" marL="0">
+                  <a:buNone/>
+                </a:pPr>
+                <a:r>
+                  <a:rPr/>
+                  <a:t>The convenient formula for the sample variance is</a:t>
+                </a:r>
+              </a:p>
+              <a:p>
+                <a:pPr lvl="0" indent="0" marL="0">
+                  <a:buNone/>
+                </a:pPr>
+                <a14:m>
+                  <m:oMathPara xmlns:m="http://schemas.openxmlformats.org/officeDocument/2006/math">
+                    <m:oMathParaPr>
+                      <m:jc m:val="center"/>
+                    </m:oMathParaPr>
+                    <m:oMath>
+                      <m:sSup>
+                        <m:e>
+                          <m:r>
+                            <m:t>s</m:t>
+                          </m:r>
+                        </m:e>
+                        <m:sup>
+                          <m:r>
+                            <m:t>2</m:t>
+                          </m:r>
+                        </m:sup>
+                      </m:sSup>
+                      <m:r>
+                        <m:rPr>
+                          <m:sty m:val="p"/>
+                        </m:rPr>
+                        <m:t>=</m:t>
+                      </m:r>
+                      <m:f>
+                        <m:fPr>
+                          <m:type m:val="bar"/>
+                        </m:fPr>
+                        <m:num>
+                          <m:nary>
+                            <m:naryPr>
+                              <m:chr m:val="∑"/>
+                              <m:limLoc m:val="undOvr"/>
+                              <m:subHide m:val="off"/>
+                              <m:supHide m:val="off"/>
+                            </m:naryPr>
+                            <m:sub>
+                              <m:r>
+                                <m:t>i</m:t>
+                              </m:r>
+                              <m:r>
+                                <m:rPr>
+                                  <m:sty m:val="p"/>
+                                </m:rPr>
+                                <m:t>=</m:t>
+                              </m:r>
+                              <m:r>
+                                <m:t>1</m:t>
+                              </m:r>
+                            </m:sub>
+                            <m:sup>
+                              <m:r>
+                                <m:t>n</m:t>
+                              </m:r>
+                            </m:sup>
+                            <m:e>
+                              <m:sSubSup>
+                                <m:e>
+                                  <m:r>
+                                    <m:t>x</m:t>
+                                  </m:r>
+                                </m:e>
+                                <m:sub>
+                                  <m:r>
+                                    <m:t>i</m:t>
+                                  </m:r>
+                                </m:sub>
+                                <m:sup>
+                                  <m:r>
+                                    <m:t>2</m:t>
+                                  </m:r>
+                                </m:sup>
+                              </m:sSubSup>
+                            </m:e>
+                          </m:nary>
+                          <m:r>
+                            <m:rPr>
+                              <m:sty m:val="p"/>
+                            </m:rPr>
+                            <m:t>−</m:t>
+                          </m:r>
+                          <m:f>
+                            <m:fPr>
+                              <m:type m:val="bar"/>
+                            </m:fPr>
+                            <m:num>
+                              <m:sSup>
+                                <m:e>
+                                  <m:d>
+                                    <m:dPr>
+                                      <m:begChr m:val="("/>
+                                      <m:sepChr m:val=""/>
+                                      <m:endChr m:val=")"/>
+                                      <m:grow/>
+                                    </m:dPr>
+                                    <m:e>
+                                      <m:nary>
+                                        <m:naryPr>
+                                          <m:chr m:val="∑"/>
+                                          <m:limLoc m:val="undOvr"/>
+                                          <m:subHide m:val="off"/>
+                                          <m:supHide m:val="off"/>
+                                        </m:naryPr>
+                                        <m:sub>
+                                          <m:r>
+                                            <m:t>i</m:t>
+                                          </m:r>
+                                          <m:r>
+                                            <m:rPr>
+                                              <m:sty m:val="p"/>
+                                            </m:rPr>
+                                            <m:t>=</m:t>
+                                          </m:r>
+                                          <m:r>
+                                            <m:t>1</m:t>
+                                          </m:r>
+                                        </m:sub>
+                                        <m:sup>
+                                          <m:r>
+                                            <m:t>n</m:t>
+                                          </m:r>
+                                        </m:sup>
+                                        <m:e>
+                                          <m:sSub>
+                                            <m:e>
+                                              <m:r>
+                                                <m:t>x</m:t>
+                                              </m:r>
+                                            </m:e>
+                                            <m:sub>
+                                              <m:r>
+                                                <m:t>i</m:t>
+                                              </m:r>
+                                            </m:sub>
+                                          </m:sSub>
+                                        </m:e>
+                                      </m:nary>
+                                    </m:e>
+                                  </m:d>
+                                </m:e>
+                                <m:sup>
+                                  <m:r>
+                                    <m:t>2</m:t>
+                                  </m:r>
+                                </m:sup>
+                              </m:sSup>
+                            </m:num>
+                            <m:den>
+                              <m:r>
+                                <m:t>n</m:t>
+                              </m:r>
+                            </m:den>
+                          </m:f>
+                        </m:num>
+                        <m:den>
+                          <m:r>
+                            <m:t>n</m:t>
+                          </m:r>
+                          <m:r>
+                            <m:rPr>
+                              <m:sty m:val="p"/>
+                            </m:rPr>
+                            <m:t>−</m:t>
+                          </m:r>
+                          <m:r>
+                            <m:t>1</m:t>
+                          </m:r>
+                        </m:den>
+                      </m:f>
+                      <m:r>
+                        <m:rPr>
+                          <m:sty m:val="p"/>
+                        </m:rPr>
+                        <m:t>.</m:t>
+                      </m:r>
+                    </m:oMath>
+                  </m:oMathPara>
+                </a14:m>
+              </a:p>
+              <a:p>
+                <a:pPr lvl="0" indent="0" marL="0">
+                  <a:buNone/>
+                </a:pPr>
+                <a:r>
+                  <a:rPr/>
+                  <a:t>Substituting the values from the table:</a:t>
+                </a:r>
+              </a:p>
+              <a:p>
+                <a:pPr lvl="0" indent="0" marL="0">
+                  <a:buNone/>
+                </a:pPr>
+                <a14:m>
+                  <m:oMathPara xmlns:m="http://schemas.openxmlformats.org/officeDocument/2006/math">
+                    <m:oMathParaPr>
+                      <m:jc m:val="center"/>
+                    </m:oMathParaPr>
+                    <m:oMath>
+                      <m:m>
+                        <m:mPr>
+                          <m:baseJc m:val="center"/>
+                          <m:plcHide m:val="on"/>
+                          <m:mcs>
+                            <m:mc>
+                              <m:mcPr>
+                                <m:mcJc m:val="right"/>
+                                <m:count m:val="1"/>
+                              </m:mcPr>
+                            </m:mc>
+                            <m:mc>
+                              <m:mcPr>
+                                <m:mcJc m:val="left"/>
+                                <m:count m:val="1"/>
+                              </m:mcPr>
+                            </m:mc>
+                          </m:mcs>
+                        </m:mPr>
+                        <m:mr>
+                          <m:e>
+                            <m:sSup>
+                              <m:e>
+                                <m:r>
+                                  <m:t>s</m:t>
+                                </m:r>
+                              </m:e>
+                              <m:sup>
+                                <m:r>
+                                  <m:t>2</m:t>
+                                </m:r>
+                              </m:sup>
+                            </m:sSup>
+                          </m:e>
+                          <m:e>
+                            <m:r>
+                              <m:rPr>
+                                <m:sty m:val="p"/>
+                              </m:rPr>
+                              <m:t>=</m:t>
+                            </m:r>
+                            <m:f>
+                              <m:fPr>
+                                <m:type m:val="bar"/>
+                              </m:fPr>
+                              <m:num>
+                                <m:r>
+                                  <m:t>475</m:t>
+                                </m:r>
+                                <m:r>
+                                  <m:rPr>
+                                    <m:sty m:val="p"/>
+                                  </m:rPr>
+                                  <m:t>−</m:t>
+                                </m:r>
+                                <m:f>
+                                  <m:fPr>
+                                    <m:type m:val="bar"/>
+                                  </m:fPr>
+                                  <m:num>
+                                    <m:sSup>
+                                      <m:e>
+                                        <m:r>
+                                          <m:t>45</m:t>
+                                        </m:r>
+                                      </m:e>
+                                      <m:sup>
+                                        <m:r>
+                                          <m:t>2</m:t>
+                                        </m:r>
+                                      </m:sup>
+                                    </m:sSup>
+                                  </m:num>
+                                  <m:den>
+                                    <m:r>
+                                      <m:t>5</m:t>
+                                    </m:r>
+                                  </m:den>
+                                </m:f>
+                              </m:num>
+                              <m:den>
+                                <m:r>
+                                  <m:t>5</m:t>
+                                </m:r>
+                                <m:r>
+                                  <m:rPr>
+                                    <m:sty m:val="p"/>
+                                  </m:rPr>
+                                  <m:t>−</m:t>
+                                </m:r>
+                                <m:r>
+                                  <m:t>1</m:t>
+                                </m:r>
+                              </m:den>
+                            </m:f>
+                          </m:e>
+                        </m:mr>
+                        <m:mr>
+                          <m:e/>
+                          <m:e>
+                            <m:r>
+                              <m:rPr>
+                                <m:sty m:val="p"/>
+                              </m:rPr>
+                              <m:t>=</m:t>
+                            </m:r>
+                            <m:f>
+                              <m:fPr>
+                                <m:type m:val="bar"/>
+                              </m:fPr>
+                              <m:num>
+                                <m:r>
+                                  <m:t>475</m:t>
+                                </m:r>
+                                <m:r>
+                                  <m:rPr>
+                                    <m:sty m:val="p"/>
+                                  </m:rPr>
+                                  <m:t>−</m:t>
+                                </m:r>
+                                <m:r>
+                                  <m:t>405</m:t>
+                                </m:r>
+                              </m:num>
+                              <m:den>
+                                <m:r>
+                                  <m:t>4</m:t>
+                                </m:r>
+                              </m:den>
+                            </m:f>
+                          </m:e>
+                        </m:mr>
+                        <m:mr>
+                          <m:e/>
+                          <m:e>
+                            <m:r>
+                              <m:rPr>
+                                <m:sty m:val="p"/>
+                              </m:rPr>
+                              <m:t>=</m:t>
+                            </m:r>
+                            <m:f>
+                              <m:fPr>
+                                <m:type m:val="bar"/>
+                              </m:fPr>
+                              <m:num>
+                                <m:r>
+                                  <m:t>70</m:t>
+                                </m:r>
+                              </m:num>
+                              <m:den>
+                                <m:r>
+                                  <m:t>4</m:t>
+                                </m:r>
+                              </m:den>
+                            </m:f>
+                          </m:e>
+                        </m:mr>
+                        <m:mr>
+                          <m:e/>
+                          <m:e>
+                            <m:r>
+                              <m:rPr>
+                                <m:sty m:val="p"/>
+                              </m:rPr>
+                              <m:t>=</m:t>
+                            </m:r>
+                            <m:r>
+                              <m:t>17.5</m:t>
+                            </m:r>
+                            <m:r>
+                              <m:rPr>
+                                <m:sty m:val="p"/>
+                              </m:rPr>
+                              <m:t>.</m:t>
+                            </m:r>
+                          </m:e>
+                        </m:mr>
+                      </m:m>
+                    </m:oMath>
+                  </m:oMathPara>
+                </a14:m>
+              </a:p>
+              <a:p>
+                <a:pPr lvl="0" indent="0" marL="0">
+                  <a:buNone/>
+                </a:pPr>
+                <a:r>
+                  <a:rPr/>
+                  <a:t>Both methods give the same sample variance:</a:t>
+                </a:r>
+              </a:p>
+              <a:p>
+                <a:pPr lvl="0" indent="0" marL="0">
+                  <a:buNone/>
+                </a:pPr>
+                <a14:m>
+                  <m:oMathPara xmlns:m="http://schemas.openxmlformats.org/officeDocument/2006/math">
+                    <m:oMathParaPr>
+                      <m:jc m:val="center"/>
+                    </m:oMathParaPr>
+                    <m:oMath>
+                      <m:borderBox>
+                        <m:e>
+                          <m:sSup>
+                            <m:e>
+                              <m:r>
+                                <m:t>s</m:t>
+                              </m:r>
+                            </m:e>
+                            <m:sup>
+                              <m:r>
+                                <m:t>2</m:t>
+                              </m:r>
+                            </m:sup>
+                          </m:sSup>
+                          <m:r>
+                            <m:rPr>
+                              <m:sty m:val="p"/>
+                            </m:rPr>
+                            <m:t>=</m:t>
+                          </m:r>
+                          <m:r>
+                            <m:t>17.5</m:t>
+                          </m:r>
+                        </m:e>
+                      </m:borderBox>
+                    </m:oMath>
+                  </m:oMathPara>
+                </a14:m>
+              </a:p>
+              <a:p>
+                <a:pPr lvl="0" indent="0" marL="0">
+                  <a:spcBef>
+                    <a:spcPts val="3000"/>
+                  </a:spcBef>
+                  <a:buNone/>
+                </a:pPr>
+                <a:r>
+                  <a:rPr b="1"/>
+                  <a:t>Step 5: Calculate the sample standard deviation</a:t>
+                </a:r>
+              </a:p>
+              <a:p>
+                <a:pPr lvl="0" indent="0" marL="0">
+                  <a:buNone/>
+                </a:pPr>
+                <a14:m>
+                  <m:oMathPara xmlns:m="http://schemas.openxmlformats.org/officeDocument/2006/math">
+                    <m:oMathParaPr>
+                      <m:jc m:val="center"/>
+                    </m:oMathParaPr>
+                    <m:oMath>
+                      <m:m>
+                        <m:mPr>
+                          <m:baseJc m:val="center"/>
+                          <m:plcHide m:val="on"/>
+                          <m:mcs>
+                            <m:mc>
+                              <m:mcPr>
+                                <m:mcJc m:val="right"/>
+                                <m:count m:val="1"/>
+                              </m:mcPr>
+                            </m:mc>
+                            <m:mc>
+                              <m:mcPr>
+                                <m:mcJc m:val="left"/>
+                                <m:count m:val="1"/>
+                              </m:mcPr>
+                            </m:mc>
+                          </m:mcs>
+                        </m:mPr>
+                        <m:mr>
+                          <m:e>
+                            <m:r>
+                              <m:t>s</m:t>
+                            </m:r>
+                          </m:e>
+                          <m:e>
+                            <m:r>
+                              <m:rPr>
+                                <m:sty m:val="p"/>
+                              </m:rPr>
+                              <m:t>=</m:t>
+                            </m:r>
+                            <m:rad>
+                              <m:radPr>
+                                <m:degHide m:val="on"/>
+                              </m:radPr>
+                              <m:deg/>
+                              <m:e>
+                                <m:sSup>
+                                  <m:e>
+                                    <m:r>
+                                      <m:t>s</m:t>
+                                    </m:r>
+                                  </m:e>
+                                  <m:sup>
+                                    <m:r>
+                                      <m:t>2</m:t>
+                                    </m:r>
+                                  </m:sup>
+                                </m:sSup>
+                              </m:e>
+                            </m:rad>
+                          </m:e>
+                        </m:mr>
+                        <m:mr>
+                          <m:e/>
+                          <m:e>
+                            <m:r>
+                              <m:rPr>
+                                <m:sty m:val="p"/>
+                              </m:rPr>
+                              <m:t>=</m:t>
+                            </m:r>
+                            <m:rad>
+                              <m:radPr>
+                                <m:degHide m:val="on"/>
+                              </m:radPr>
+                              <m:deg/>
+                              <m:e>
+                                <m:r>
+                                  <m:t>17.5</m:t>
+                                </m:r>
+                              </m:e>
+                            </m:rad>
+                          </m:e>
+                        </m:mr>
+                        <m:mr>
+                          <m:e/>
+                          <m:e>
+                            <m:r>
+                              <m:rPr>
+                                <m:sty m:val="p"/>
+                              </m:rPr>
+                              <m:t>≈</m:t>
+                            </m:r>
+                            <m:r>
+                              <m:t>4.18</m:t>
+                            </m:r>
+                            <m:r>
+                              <m:rPr>
+                                <m:sty m:val="p"/>
+                              </m:rPr>
+                              <m:t>.</m:t>
+                            </m:r>
+                          </m:e>
+                        </m:mr>
+                      </m:m>
+                    </m:oMath>
+                  </m:oMathPara>
+                </a14:m>
+              </a:p>
+              <a:p>
+                <a:pPr lvl="0" indent="0" marL="0">
+                  <a:buNone/>
+                </a:pPr>
+                <a:r>
+                  <a:rPr/>
+                  <a:t>Therefore,</a:t>
+                </a:r>
+              </a:p>
+              <a:p>
+                <a:pPr lvl="0" indent="0" marL="0">
+                  <a:buNone/>
+                </a:pPr>
+                <a14:m>
+                  <m:oMathPara xmlns:m="http://schemas.openxmlformats.org/officeDocument/2006/math">
+                    <m:oMathParaPr>
+                      <m:jc m:val="center"/>
+                    </m:oMathParaPr>
+                    <m:oMath>
+                      <m:borderBox>
+                        <m:e>
+                          <m:r>
+                            <m:t>s</m:t>
+                          </m:r>
+                          <m:r>
+                            <m:rPr>
+                              <m:sty m:val="p"/>
+                            </m:rPr>
+                            <m:t>≈</m:t>
+                          </m:r>
+                          <m:r>
+                            <m:t>4.18</m:t>
+                          </m:r>
+                        </m:e>
+                      </m:borderBox>
+                    </m:oMath>
+                  </m:oMathPara>
+                </a14:m>
+              </a:p>
+            </p:txBody>
+          </p:sp>
+        </mc:Choice>
+      </mc:AlternateContent>
+      <p:sp>
+        <p:nvSpPr>
+          <p:cNvPr id="4" name="Slide Number Placeholder 3"/>
+          <p:cNvSpPr>
+            <a:spLocks noGrp="1"/>
+          </p:cNvSpPr>
+          <p:nvPr>
+            <p:ph idx="10" sz="quarter" type="sldNum"/>
+          </p:nvPr>
+        </p:nvSpPr>
+        <p:spPr/>
+        <p:txBody>
+          <a:bodyPr/>
+          <a:lstStyle/>
+          <a:p>
+            <a:fld id="{9C13042B-154E-4D18-B726-07B2F714EFCF}" type="slidenum">
+              <a:rPr lang="en-US" smtClean="0"/>
+              <a:pPr/>
+              <a:t>‹#›</a:t>
+            </a:fld>
+            <a:endParaRPr dirty="0" lang="en-US"/>
+          </a:p>
+        </p:txBody>
+      </p:sp>
+    </p:spTree>
+  </p:cSld>
+</p:sld>
+</file>
+
+<file path=ppt/slides/slide24.xml><?xml version="1.0" encoding="utf-8"?>
+<p:sld xmlns:a="http://schemas.openxmlformats.org/drawingml/2006/main" xmlns:r="http://schemas.openxmlformats.org/officeDocument/2006/relationships" xmlns:p="http://schemas.openxmlformats.org/presentationml/2006/main">
+  <p:cSld>
+    <p:spTree>
+      <p:nvGrpSpPr>
+        <p:cNvPr id="1" name=""/>
+        <p:cNvGrpSpPr/>
+        <p:nvPr/>
+      </p:nvGrpSpPr>
+      <p:grpSpPr>
+        <a:xfrm>
+          <a:off x="0" y="0"/>
+          <a:ext cx="0" cy="0"/>
+          <a:chOff x="0" y="0"/>
+          <a:chExt cx="0" cy="0"/>
+        </a:xfrm>
+      </p:grpSpPr>
       <p:sp>
         <p:nvSpPr>
           <p:cNvPr id="2" name="Title Placeholder 1"/>
@@ -6620,7 +7600,7 @@
             </a:pPr>
             <a:r>
               <a:rPr/>
-              <a:t>Settling in</a:t>
+              <a:t>Quiz 01</a:t>
             </a:r>
           </a:p>
         </p:txBody>
@@ -6643,52 +7623,82 @@
             <a:pPr lvl="0"/>
             <a:r>
               <a:rPr/>
-              <a:t>💻 Put away your laptop and mobile phone, and take out your notebook or preferred writing device.</a:t>
+              <a:t>We have now covered all the topics included in </a:t>
+            </a:r>
+            <a:r>
+              <a:rPr b="1"/>
+              <a:t>Quiz 01</a:t>
+            </a:r>
+            <a:r>
+              <a:rPr/>
+              <a:t>, which covers </a:t>
+            </a:r>
+            <a:r>
+              <a:rPr b="1"/>
+              <a:t>Units 01 and 02</a:t>
+            </a:r>
+            <a:r>
+              <a:rPr/>
+              <a:t>.</a:t>
             </a:r>
           </a:p>
           <a:p>
             <a:pPr lvl="0"/>
             <a:r>
               <a:rPr/>
-              <a:t>💬 Chat with your neighbors and share one thing you plan to do this weekend.</a:t>
+              <a:t>Before attempting the quiz, carefully review the course material covered since the first day of class, including:</a:t>
+            </a:r>
+          </a:p>
+          <a:p>
+            <a:pPr lvl="1"/>
+            <a:r>
+              <a:rPr/>
+              <a:t>Class notes</a:t>
+            </a:r>
+          </a:p>
+          <a:p>
+            <a:pPr lvl="1"/>
+            <a:r>
+              <a:rPr/>
+              <a:t>Whiteboard notes</a:t>
+            </a:r>
+          </a:p>
+          <a:p>
+            <a:pPr lvl="1"/>
+            <a:r>
+              <a:rPr/>
+              <a:t>Handouts</a:t>
+            </a:r>
+          </a:p>
+          <a:p>
+            <a:pPr lvl="1"/>
+            <a:r>
+              <a:rPr/>
+              <a:t>Relevant textbook sections, especially if you missed a class</a:t>
             </a:r>
           </a:p>
           <a:p>
             <a:pPr lvl="0"/>
             <a:r>
               <a:rPr/>
-              <a:t>🎵 Enjoy the music! CWRU playlist was created from your responses to the Early Course Survey and I will continue to add more songs from your replies.</a:t>
+              <a:t>Quiz 01 is designed to assess your general understanding of the course material covered so far.</a:t>
             </a:r>
           </a:p>
           <a:p>
             <a:pPr lvl="0"/>
             <a:r>
-              <a:rPr/>
-              <a:t>⏳ We’ll get started shortly!</a:t>
-            </a:r>
-          </a:p>
-          <a:p>
-            <a:pPr lvl="0"/>
-            <a:r>
-              <a:rPr/>
-              <a:t>Download additional Handout on </a:t>
-            </a:r>
-            <a:r>
-              <a:rPr>
-                <a:hlinkClick r:id="rId2"/>
-              </a:rPr>
-              <a:t>Boxplot</a:t>
-            </a:r>
-            <a:r>
-              <a:rPr/>
-              <a:t> (no need to print and bring it in the class though!)</a:t>
+              <a:rPr b="1"/>
+              <a:t>Due:</a:t>
+            </a:r>
+            <a:r>
+              <a:rPr/>
+              <a:t> Thursday, September 3, at 11:59 p.m. on Canvas.</a:t>
             </a:r>
           </a:p>
           <a:p>
             <a:pPr lvl="0" indent="0" marL="0">
               <a:buNone/>
             </a:pPr>
-            <a:br/>
             <a:br/>
             <a:br/>
             <a:br/>
@@ -8670,6 +9680,23 @@
             <a:pPr lvl="0"/>
             <a:r>
               <a:rPr/>
+              <a:t>Download additional Handout on </a:t>
+            </a:r>
+            <a:r>
+              <a:rPr>
+                <a:hlinkClick r:id="rId3"/>
+              </a:rPr>
+              <a:t>Boxplot</a:t>
+            </a:r>
+            <a:r>
+              <a:rPr/>
+              <a:t> (no need to print and bring it in the class though!)</a:t>
+            </a:r>
+          </a:p>
+          <a:p>
+            <a:pPr lvl="0"/>
+            <a:r>
+              <a:rPr/>
               <a:t>I will continue to post additional handouts as we progress through the course. Please watch for </a:t>
             </a:r>
             <a:r>
@@ -8859,6 +9886,55 @@
                                           <p:spTgt spid="3">
                                             <p:txEl>
                                               <p:pRg st="2" end="2"/>
+                                            </p:txEl>
+                                          </p:spTgt>
+                                        </p:tgtEl>
+                                        <p:attrNameLst>
+                                          <p:attrName>style.visibility</p:attrName>
+                                        </p:attrNameLst>
+                                      </p:cBhvr>
+                                      <p:to>
+                                        <p:strVal val="visible"/>
+                                      </p:to>
+                                    </p:set>
+                                  </p:childTnLst>
+                                </p:cTn>
+                              </p:par>
+                            </p:childTnLst>
+                          </p:cTn>
+                        </p:par>
+                      </p:childTnLst>
+                    </p:cTn>
+                  </p:par>
+                  <p:par>
+                    <p:cTn id="15" fill="hold">
+                      <p:stCondLst>
+                        <p:cond delay="indefinite"/>
+                      </p:stCondLst>
+                      <p:childTnLst>
+                        <p:par>
+                          <p:cTn id="16" fill="hold">
+                            <p:stCondLst>
+                              <p:cond delay="0"/>
+                            </p:stCondLst>
+                            <p:childTnLst>
+                              <p:par>
+                                <p:cTn id="17" presetID="1" presetClass="entr" presetSubtype="0" fill="hold" grpId="0" nodeType="clickEffect">
+                                  <p:stCondLst>
+                                    <p:cond delay="0"/>
+                                  </p:stCondLst>
+                                  <p:childTnLst>
+                                    <p:set>
+                                      <p:cBhvr>
+                                        <p:cTn id="18" dur="1" fill="hold">
+                                          <p:stCondLst>
+                                            <p:cond delay="0"/>
+                                          </p:stCondLst>
+                                        </p:cTn>
+                                        <p:tgtEl>
+                                          <p:spTgt spid="3">
+                                            <p:txEl>
+                                              <p:pRg st="3" end="3"/>
                                             </p:txEl>
                                           </p:spTgt>
                                         </p:tgtEl>
